--- a/dist/초6/수학/연산과비례/초6_수학_연산과비례_04_소수의나눗셈2.pptx
+++ b/dist/초6/수학/연산과비례/초6_수학_연산과비례_04_소수의나눗셈2.pptx
@@ -121,13 +121,13 @@
   <p:extLst>
     <p:ext uri="{521415D9-36F7-43E2-AB2F-B90AF26B5E84}">
       <p14:sectionLst xmlns:p14="http://schemas.microsoft.com/office/powerpoint/2010/main">
-        <p14:section name="도입" id="{921e0ccf-c757-1f95-6837-9be7beb06877}">
+        <p14:section name="도입" id="{5bcada6e-6386-b1ab-57f6-15c24c798021}">
           <p14:sldIdLst>
             <p14:sldId id="256"/>
             <p14:sldId id="257"/>
           </p14:sldIdLst>
         </p14:section>
-        <p14:section name="개념" id="{b756c6ef-4b84-fce6-6eee-b8078af9bfaa}">
+        <p14:section name="개념" id="{70dc5077-4370-910c-eaab-5b21a0f08dbb}">
           <p14:sldIdLst>
             <p14:sldId id="258"/>
             <p14:sldId id="259"/>
@@ -135,7 +135,7 @@
             <p14:sldId id="263"/>
           </p14:sldIdLst>
         </p14:section>
-        <p14:section name="연습" id="{7b48e280-5734-c34b-32db-dfb9d6580f53}">
+        <p14:section name="연습" id="{7f49ba6e-5baa-e0a0-4622-eb5eb2bd5522}">
           <p14:sldIdLst>
             <p14:sldId id="260"/>
             <p14:sldId id="261"/>
@@ -143,25 +143,25 @@
             <p14:sldId id="265"/>
           </p14:sldIdLst>
         </p14:section>
-        <p14:section name="개념" id="{d330051a-2b5f-fa94-a032-618f1b33b80a}">
+        <p14:section name="개념" id="{2a648f8b-b38e-5de2-c779-eda32a91fe75}">
           <p14:sldIdLst/>
         </p14:section>
-        <p14:section name="연습" id="{ed055809-0227-8df9-d27a-1ba9bdd6e11f}">
+        <p14:section name="연습" id="{7a4a28b6-8a65-465d-4fbc-63c9f96836fe}">
           <p14:sldIdLst/>
         </p14:section>
-        <p14:section name="확인" id="{dcc88123-2ce8-9f82-172f-98bad5325b44}">
+        <p14:section name="확인" id="{5a5d6742-d78a-8a10-b328-280c97a74112}">
           <p14:sldIdLst>
             <p14:sldId id="266"/>
             <p14:sldId id="267"/>
             <p14:sldId id="268"/>
           </p14:sldIdLst>
         </p14:section>
-        <p14:section name="정리" id="{b7020514-b448-5e9d-25f7-91634e1fc574}">
+        <p14:section name="정리" id="{67abf7ab-1941-07c9-56b2-945c43429767}">
           <p14:sldIdLst>
             <p14:sldId id="269"/>
           </p14:sldIdLst>
         </p14:section>
-        <p14:section name="보충" id="{8438889d-ed50-b14b-761f-9f9b20b85d20}">
+        <p14:section name="보충" id="{280235a2-5765-86b1-4d90-8f65f8ec541a}">
           <p14:sldIdLst>
             <p14:sldId id="270"/>
           </p14:sldIdLst>
@@ -3134,7 +3134,7 @@
                 <a:ea typeface="맑은 고딕" pitchFamily="34" charset="-122"/>
                 <a:cs typeface="맑은 고딕" pitchFamily="34" charset="-120"/>
               </a:rPr>
-              <a:t>1.8 m 끈을 0.3 m씩 자르면</a:t>
+              <a:t>1.8 m 끈을 0.3 m씩 자르면</a:t>
             </a:r>
             <a:endParaRPr lang="ko-KR" sz="2800" dirty="0"/>
           </a:p>
@@ -3434,7 +3434,7 @@
                 <a:ea typeface="맑은 고딕" pitchFamily="34" charset="-122"/>
                 <a:cs typeface="맑은 고딕" pitchFamily="34" charset="-120"/>
               </a:rPr>
-              <a:t>물 6.3 L를 0.5 L 병에 가득 담았어요.</a:t>
+              <a:t>물 6.3 L를 0.5 L 병에 가득 담았어요.</a:t>
             </a:r>
             <a:endParaRPr lang="ko-KR" sz="2800" dirty="0"/>
           </a:p>
@@ -3503,7 +3503,7 @@
                 <a:ea typeface="맑은 고딕" pitchFamily="34" charset="-122"/>
                 <a:cs typeface="맑은 고딕" pitchFamily="34" charset="-120"/>
               </a:rPr>
-              <a:t>남는 물이 병 하나(0.5 L)보다 많을 수 있을까요?</a:t>
+              <a:t>남는 물이 병 하나(0.5 L)보다 많을 수 있을까요?</a:t>
             </a:r>
             <a:endParaRPr lang="ko-KR" sz="2800" dirty="0"/>
           </a:p>
@@ -3550,7 +3550,7 @@
                 <a:ea typeface="맑은 고딕" pitchFamily="34" charset="-122"/>
                 <a:cs typeface="맑은 고딕" pitchFamily="34" charset="-120"/>
               </a:rPr>
-              <a:t>토끼: 12병, 3 L</a:t>
+              <a:t>토끼: 12병, 3 L</a:t>
             </a:r>
             <a:endParaRPr lang="ko-KR" sz="2200" dirty="0"/>
           </a:p>
@@ -3606,7 +3606,7 @@
                 <a:ea typeface="맑은 고딕" pitchFamily="34" charset="-122"/>
                 <a:cs typeface="맑은 고딕" pitchFamily="34" charset="-120"/>
               </a:rPr>
-              <a:t>남는 양은 3 L예요.</a:t>
+              <a:t>남는 양은 3 L예요.</a:t>
             </a:r>
             <a:endParaRPr lang="ko-KR" sz="2800" dirty="0"/>
           </a:p>
@@ -3653,7 +3653,7 @@
                 <a:ea typeface="맑은 고딕" pitchFamily="34" charset="-122"/>
                 <a:cs typeface="맑은 고딕" pitchFamily="34" charset="-120"/>
               </a:rPr>
-              <a:t>곰: 12병, 0.3 L</a:t>
+              <a:t>곰: 12병, 0.3 L</a:t>
             </a:r>
             <a:endParaRPr lang="ko-KR" sz="2200" dirty="0"/>
           </a:p>
@@ -4201,7 +4201,7 @@
                 <a:ea typeface="맑은 고딕" pitchFamily="34" charset="-122"/>
                 <a:cs typeface="맑은 고딕" pitchFamily="34" charset="-120"/>
               </a:rPr>
-              <a:t>끈 8.5 m를 1.2 m씩</a:t>
+              <a:t>끈 8.5 m를 1.2 m씩</a:t>
             </a:r>
             <a:endParaRPr lang="ko-KR" sz="2800" dirty="0"/>
           </a:p>
@@ -4738,7 +4738,7 @@
                 <a:ea typeface="맑은 고딕" pitchFamily="34" charset="-122"/>
                 <a:cs typeface="맑은 고딕" pitchFamily="34" charset="-120"/>
               </a:rPr>
-              <a:t>④ 7도막, 0.1 m</a:t>
+              <a:t>④ 7도막, 0.1 m</a:t>
             </a:r>
             <a:endParaRPr lang="ko-KR" sz="2200" dirty="0"/>
           </a:p>
@@ -4941,7 +4941,7 @@
                 <a:ea typeface="맑은 고딕" pitchFamily="34" charset="-122"/>
                 <a:cs typeface="맑은 고딕" pitchFamily="34" charset="-120"/>
               </a:rPr>
-              <a:t>④ 남는 끈 1 m</a:t>
+              <a:t>④ 남는 끈 1 m</a:t>
             </a:r>
             <a:endParaRPr lang="ko-KR" sz="2800" dirty="0"/>
           </a:p>
@@ -5180,7 +5180,7 @@
                 <a:ea typeface="맑은 고딕" pitchFamily="34" charset="-122"/>
                 <a:cs typeface="맑은 고딕" pitchFamily="34" charset="-120"/>
               </a:rPr>
-              <a:t>고구마 7.4 kg을 0.6 kg씩 봉지에 담으면</a:t>
+              <a:t>고구마 7.4 kg을 0.6 kg씩 봉지에 담으면</a:t>
             </a:r>
             <a:endParaRPr lang="ko-KR" sz="2800" dirty="0"/>
           </a:p>
@@ -5283,7 +5283,7 @@
                 <a:ea typeface="맑은 고딕" pitchFamily="34" charset="-122"/>
                 <a:cs typeface="맑은 고딕" pitchFamily="34" charset="-120"/>
               </a:rPr>
-              <a:t>키가 1.5 m인 사람의 그림자가 2.2 m예요.</a:t>
+              <a:t>키가 1.5 m인 사람의 그림자가 2.2 m예요.</a:t>
             </a:r>
             <a:endParaRPr lang="ko-KR" sz="2800" dirty="0"/>
           </a:p>
@@ -6215,7 +6215,7 @@
           </p:nvPr>
         </p:nvGraphicFramePr>
         <p:xfrm>
-          <a:off x="4448556" y="2058924"/>
+          <a:off x="4448556" y="2074164"/>
           <a:ext cx="3291840" cy="914400"/>
         </p:xfrm>
         <a:graphic>
@@ -6227,7 +6227,7 @@
                 <a:gridCol w="987552"/>
                 <a:gridCol w="987552"/>
               </a:tblGrid>
-              <a:tr h="393700">
+              <a:tr h="388620">
                 <a:tc>
                   <a:txBody>
                     <a:bodyPr/>
@@ -6237,7 +6237,7 @@
                         <a:buNone/>
                       </a:pPr>
                       <a:r>
-                        <a:rPr lang="en-US" sz="2000" b="1" dirty="0">
+                        <a:rPr lang="en-US" sz="1800" b="1" dirty="0">
                           <a:solidFill>
                             <a:srgbClr val="1F2937"/>
                           </a:solidFill>
@@ -6247,7 +6247,7 @@
                         </a:rPr>
                         <a:t>몫</a:t>
                       </a:r>
-                      <a:endParaRPr lang="en-US" sz="2000" dirty="0">
+                      <a:endParaRPr lang="en-US" sz="1800" dirty="0">
                         <a:latin typeface="맑은 고딕" charset="0"/>
                         <a:ea typeface="맑은 고딕" charset="0"/>
                         <a:cs typeface="맑은 고딕" charset="0"/>
@@ -6305,7 +6305,7 @@
                         <a:buNone/>
                       </a:pPr>
                       <a:r>
-                        <a:rPr lang="en-US" sz="2000" dirty="0">
+                        <a:rPr lang="en-US" sz="1800" dirty="0">
                           <a:solidFill>
                             <a:srgbClr val="1F2937"/>
                           </a:solidFill>
@@ -6315,7 +6315,7 @@
                         </a:rPr>
                         <a:t>2.</a:t>
                       </a:r>
-                      <a:endParaRPr lang="en-US" sz="2000" dirty="0">
+                      <a:endParaRPr lang="en-US" sz="1800" dirty="0">
                         <a:latin typeface="맑은 고딕" charset="0"/>
                         <a:ea typeface="맑은 고딕" charset="0"/>
                         <a:cs typeface="맑은 고딕" charset="0"/>
@@ -6373,7 +6373,7 @@
                         <a:buNone/>
                       </a:pPr>
                       <a:r>
-                        <a:rPr lang="en-US" sz="2000" dirty="0">
+                        <a:rPr lang="en-US" sz="1800" dirty="0">
                           <a:solidFill>
                             <a:srgbClr val="1F2937"/>
                           </a:solidFill>
@@ -6383,7 +6383,7 @@
                         </a:rPr>
                         <a:t>1</a:t>
                       </a:r>
-                      <a:endParaRPr lang="en-US" sz="2000" dirty="0">
+                      <a:endParaRPr lang="en-US" sz="1800" dirty="0">
                         <a:latin typeface="맑은 고딕" charset="0"/>
                         <a:ea typeface="맑은 고딕" charset="0"/>
                         <a:cs typeface="맑은 고딕" charset="0"/>
@@ -6433,7 +6433,7 @@
                   </a:tcPr>
                 </a:tc>
               </a:tr>
-              <a:tr h="393700">
+              <a:tr h="388620">
                 <a:tc>
                   <a:txBody>
                     <a:bodyPr/>
@@ -6443,7 +6443,7 @@
                         <a:buNone/>
                       </a:pPr>
                       <a:r>
-                        <a:rPr lang="en-US" sz="2000" b="1" dirty="0">
+                        <a:rPr lang="en-US" sz="1800" b="1" dirty="0">
                           <a:solidFill>
                             <a:srgbClr val="1F2937"/>
                           </a:solidFill>
@@ -6453,7 +6453,7 @@
                         </a:rPr>
                         <a:t>4 )</a:t>
                       </a:r>
-                      <a:endParaRPr lang="en-US" sz="2000" dirty="0">
+                      <a:endParaRPr lang="en-US" sz="1800" dirty="0">
                         <a:latin typeface="맑은 고딕" charset="0"/>
                         <a:ea typeface="맑은 고딕" charset="0"/>
                         <a:cs typeface="맑은 고딕" charset="0"/>
@@ -6511,7 +6511,7 @@
                         <a:buNone/>
                       </a:pPr>
                       <a:r>
-                        <a:rPr lang="en-US" sz="2000" dirty="0">
+                        <a:rPr lang="en-US" sz="1800" dirty="0">
                           <a:solidFill>
                             <a:srgbClr val="1F2937"/>
                           </a:solidFill>
@@ -6521,7 +6521,7 @@
                         </a:rPr>
                         <a:t>8.</a:t>
                       </a:r>
-                      <a:endParaRPr lang="en-US" sz="2000" dirty="0">
+                      <a:endParaRPr lang="en-US" sz="1800" dirty="0">
                         <a:latin typeface="맑은 고딕" charset="0"/>
                         <a:ea typeface="맑은 고딕" charset="0"/>
                         <a:cs typeface="맑은 고딕" charset="0"/>
@@ -6579,7 +6579,7 @@
                         <a:buNone/>
                       </a:pPr>
                       <a:r>
-                        <a:rPr lang="en-US" sz="2000" dirty="0">
+                        <a:rPr lang="en-US" sz="1800" dirty="0">
                           <a:solidFill>
                             <a:srgbClr val="1F2937"/>
                           </a:solidFill>
@@ -6589,7 +6589,7 @@
                         </a:rPr>
                         <a:t>4</a:t>
                       </a:r>
-                      <a:endParaRPr lang="en-US" sz="2000" dirty="0">
+                      <a:endParaRPr lang="en-US" sz="1800" dirty="0">
                         <a:latin typeface="맑은 고딕" charset="0"/>
                         <a:ea typeface="맑은 고딕" charset="0"/>
                         <a:cs typeface="맑은 고딕" charset="0"/>
@@ -6639,7 +6639,7 @@
                   </a:tcPr>
                 </a:tc>
               </a:tr>
-              <a:tr h="393700">
+              <a:tr h="388620">
                 <a:tc>
                   <a:txBody>
                     <a:bodyPr/>
@@ -6649,7 +6649,7 @@
                         <a:buNone/>
                       </a:pPr>
                       <a:r>
-                        <a:rPr lang="en-US" sz="2000" b="1" dirty="0">
+                        <a:rPr lang="en-US" sz="1800" b="1" dirty="0">
                           <a:solidFill>
                             <a:srgbClr val="1F2937"/>
                           </a:solidFill>
@@ -6659,7 +6659,7 @@
                         </a:rPr>
                         <a:t>4 × 2</a:t>
                       </a:r>
-                      <a:endParaRPr lang="en-US" sz="2000" dirty="0">
+                      <a:endParaRPr lang="en-US" sz="1800" dirty="0">
                         <a:latin typeface="맑은 고딕" charset="0"/>
                         <a:ea typeface="맑은 고딕" charset="0"/>
                         <a:cs typeface="맑은 고딕" charset="0"/>
@@ -6717,7 +6717,7 @@
                         <a:buNone/>
                       </a:pPr>
                       <a:r>
-                        <a:rPr lang="en-US" sz="2000" dirty="0">
+                        <a:rPr lang="en-US" sz="1800" dirty="0">
                           <a:solidFill>
                             <a:srgbClr val="1F2937"/>
                           </a:solidFill>
@@ -6727,7 +6727,7 @@
                         </a:rPr>
                         <a:t>8</a:t>
                       </a:r>
-                      <a:endParaRPr lang="en-US" sz="2000" dirty="0">
+                      <a:endParaRPr lang="en-US" sz="1800" dirty="0">
                         <a:latin typeface="맑은 고딕" charset="0"/>
                         <a:ea typeface="맑은 고딕" charset="0"/>
                         <a:cs typeface="맑은 고딕" charset="0"/>
@@ -6784,7 +6784,7 @@
                       <a:pPr eaLnBrk="0" algn="ctr" indent="0" marL="0">
                         <a:buNone/>
                       </a:pPr>
-                      <a:endParaRPr lang="en-US" sz="2000" dirty="0">
+                      <a:endParaRPr lang="en-US" sz="1800" dirty="0">
                         <a:latin typeface="맑은 고딕" charset="0"/>
                         <a:ea typeface="맑은 고딕" charset="0"/>
                         <a:cs typeface="맑은 고딕" charset="0"/>
@@ -6834,7 +6834,7 @@
                   </a:tcPr>
                 </a:tc>
               </a:tr>
-              <a:tr h="393700">
+              <a:tr h="388620">
                 <a:tc>
                   <a:txBody>
                     <a:bodyPr/>
@@ -6844,7 +6844,7 @@
                         <a:buNone/>
                       </a:pPr>
                       <a:r>
-                        <a:rPr lang="en-US" sz="2000" b="1" dirty="0">
+                        <a:rPr lang="en-US" sz="1800" b="1" dirty="0">
                           <a:solidFill>
                             <a:srgbClr val="1F2937"/>
                           </a:solidFill>
@@ -6854,7 +6854,7 @@
                         </a:rPr>
                         <a:t>내리기</a:t>
                       </a:r>
-                      <a:endParaRPr lang="en-US" sz="2000" dirty="0">
+                      <a:endParaRPr lang="en-US" sz="1800" dirty="0">
                         <a:latin typeface="맑은 고딕" charset="0"/>
                         <a:ea typeface="맑은 고딕" charset="0"/>
                         <a:cs typeface="맑은 고딕" charset="0"/>
@@ -6911,7 +6911,7 @@
                       <a:pPr eaLnBrk="0" algn="ctr" indent="0" marL="0">
                         <a:buNone/>
                       </a:pPr>
-                      <a:endParaRPr lang="en-US" sz="2000" dirty="0">
+                      <a:endParaRPr lang="en-US" sz="1800" dirty="0">
                         <a:latin typeface="맑은 고딕" charset="0"/>
                         <a:ea typeface="맑은 고딕" charset="0"/>
                         <a:cs typeface="맑은 고딕" charset="0"/>
@@ -6969,7 +6969,7 @@
                         <a:buNone/>
                       </a:pPr>
                       <a:r>
-                        <a:rPr lang="en-US" sz="2000" dirty="0">
+                        <a:rPr lang="en-US" sz="1800" dirty="0">
                           <a:solidFill>
                             <a:srgbClr val="1F2937"/>
                           </a:solidFill>
@@ -6979,7 +6979,7 @@
                         </a:rPr>
                         <a:t>4</a:t>
                       </a:r>
-                      <a:endParaRPr lang="en-US" sz="2000" dirty="0">
+                      <a:endParaRPr lang="en-US" sz="1800" dirty="0">
                         <a:latin typeface="맑은 고딕" charset="0"/>
                         <a:ea typeface="맑은 고딕" charset="0"/>
                         <a:cs typeface="맑은 고딕" charset="0"/>
@@ -7029,7 +7029,7 @@
                   </a:tcPr>
                 </a:tc>
               </a:tr>
-              <a:tr h="393700">
+              <a:tr h="388620">
                 <a:tc>
                   <a:txBody>
                     <a:bodyPr/>
@@ -7039,7 +7039,7 @@
                         <a:buNone/>
                       </a:pPr>
                       <a:r>
-                        <a:rPr lang="en-US" sz="2000" b="1" dirty="0">
+                        <a:rPr lang="en-US" sz="1800" b="1" dirty="0">
                           <a:solidFill>
                             <a:srgbClr val="1F2937"/>
                           </a:solidFill>
@@ -7049,7 +7049,7 @@
                         </a:rPr>
                         <a:t>4 × 1</a:t>
                       </a:r>
-                      <a:endParaRPr lang="en-US" sz="2000" dirty="0">
+                      <a:endParaRPr lang="en-US" sz="1800" dirty="0">
                         <a:latin typeface="맑은 고딕" charset="0"/>
                         <a:ea typeface="맑은 고딕" charset="0"/>
                         <a:cs typeface="맑은 고딕" charset="0"/>
@@ -7106,7 +7106,7 @@
                       <a:pPr eaLnBrk="0" algn="ctr" indent="0" marL="0">
                         <a:buNone/>
                       </a:pPr>
-                      <a:endParaRPr lang="en-US" sz="2000" dirty="0">
+                      <a:endParaRPr lang="en-US" sz="1800" dirty="0">
                         <a:latin typeface="맑은 고딕" charset="0"/>
                         <a:ea typeface="맑은 고딕" charset="0"/>
                         <a:cs typeface="맑은 고딕" charset="0"/>
@@ -7164,7 +7164,7 @@
                         <a:buNone/>
                       </a:pPr>
                       <a:r>
-                        <a:rPr lang="en-US" sz="2000" dirty="0">
+                        <a:rPr lang="en-US" sz="1800" dirty="0">
                           <a:solidFill>
                             <a:srgbClr val="1F2937"/>
                           </a:solidFill>
@@ -7174,7 +7174,7 @@
                         </a:rPr>
                         <a:t>4</a:t>
                       </a:r>
-                      <a:endParaRPr lang="en-US" sz="2000" dirty="0">
+                      <a:endParaRPr lang="en-US" sz="1800" dirty="0">
                         <a:latin typeface="맑은 고딕" charset="0"/>
                         <a:ea typeface="맑은 고딕" charset="0"/>
                         <a:cs typeface="맑은 고딕" charset="0"/>
@@ -7224,7 +7224,7 @@
                   </a:tcPr>
                 </a:tc>
               </a:tr>
-              <a:tr h="393700">
+              <a:tr h="388620">
                 <a:tc>
                   <a:txBody>
                     <a:bodyPr/>
@@ -7234,7 +7234,7 @@
                         <a:buNone/>
                       </a:pPr>
                       <a:r>
-                        <a:rPr lang="en-US" sz="2000" b="1" dirty="0">
+                        <a:rPr lang="en-US" sz="1800" b="1" dirty="0">
                           <a:solidFill>
                             <a:srgbClr val="1F2937"/>
                           </a:solidFill>
@@ -7244,7 +7244,7 @@
                         </a:rPr>
                         <a:t>나머지</a:t>
                       </a:r>
-                      <a:endParaRPr lang="en-US" sz="2000" dirty="0">
+                      <a:endParaRPr lang="en-US" sz="1800" dirty="0">
                         <a:latin typeface="맑은 고딕" charset="0"/>
                         <a:ea typeface="맑은 고딕" charset="0"/>
                         <a:cs typeface="맑은 고딕" charset="0"/>
@@ -7301,7 +7301,7 @@
                       <a:pPr eaLnBrk="0" algn="ctr" indent="0" marL="0">
                         <a:buNone/>
                       </a:pPr>
-                      <a:endParaRPr lang="en-US" sz="2000" dirty="0">
+                      <a:endParaRPr lang="en-US" sz="1800" dirty="0">
                         <a:latin typeface="맑은 고딕" charset="0"/>
                         <a:ea typeface="맑은 고딕" charset="0"/>
                         <a:cs typeface="맑은 고딕" charset="0"/>
@@ -7359,7 +7359,7 @@
                         <a:buNone/>
                       </a:pPr>
                       <a:r>
-                        <a:rPr lang="en-US" sz="2000" dirty="0">
+                        <a:rPr lang="en-US" sz="1800" dirty="0">
                           <a:solidFill>
                             <a:srgbClr val="1F2937"/>
                           </a:solidFill>
@@ -7369,7 +7369,7 @@
                         </a:rPr>
                         <a:t>0</a:t>
                       </a:r>
-                      <a:endParaRPr lang="en-US" sz="2000" dirty="0">
+                      <a:endParaRPr lang="en-US" sz="1800" dirty="0">
                         <a:latin typeface="맑은 고딕" charset="0"/>
                         <a:ea typeface="맑은 고딕" charset="0"/>
                         <a:cs typeface="맑은 고딕" charset="0"/>
@@ -9769,7 +9769,7 @@
           </p:nvPr>
         </p:nvGraphicFramePr>
         <p:xfrm>
-          <a:off x="7376190" y="2030730"/>
+          <a:off x="7376190" y="2028444"/>
           <a:ext cx="4023360" cy="914400"/>
         </p:xfrm>
         <a:graphic>
@@ -9782,7 +9782,7 @@
                 <a:gridCol w="804672"/>
                 <a:gridCol w="804672"/>
               </a:tblGrid>
-              <a:tr h="511810">
+              <a:tr h="512572">
                 <a:tc>
                   <a:txBody>
                     <a:bodyPr/>
@@ -10045,7 +10045,7 @@
                   </a:tcPr>
                 </a:tc>
               </a:tr>
-              <a:tr h="511810">
+              <a:tr h="512572">
                 <a:tc>
                   <a:txBody>
                     <a:bodyPr/>
@@ -10319,7 +10319,7 @@
                   </a:tcPr>
                 </a:tc>
               </a:tr>
-              <a:tr h="511810">
+              <a:tr h="512572">
                 <a:tc>
                   <a:txBody>
                     <a:bodyPr/>
@@ -10582,7 +10582,7 @@
                   </a:tcPr>
                 </a:tc>
               </a:tr>
-              <a:tr h="511810">
+              <a:tr h="512572">
                 <a:tc>
                   <a:txBody>
                     <a:bodyPr/>
@@ -10845,7 +10845,7 @@
                   </a:tcPr>
                 </a:tc>
               </a:tr>
-              <a:tr h="511810">
+              <a:tr h="512572">
                 <a:tc>
                   <a:txBody>
                     <a:bodyPr/>
@@ -11108,7 +11108,7 @@
                   </a:tcPr>
                 </a:tc>
               </a:tr>
-              <a:tr h="511810">
+              <a:tr h="512572">
                 <a:tc>
                   <a:txBody>
                     <a:bodyPr/>
@@ -12876,7 +12876,7 @@
           </p:nvPr>
         </p:nvGraphicFramePr>
         <p:xfrm>
-          <a:off x="7123862" y="2564892"/>
+          <a:off x="7123862" y="2494788"/>
           <a:ext cx="4206240" cy="914400"/>
         </p:xfrm>
         <a:graphic>
@@ -12890,7 +12890,7 @@
                 <a:gridCol w="715061"/>
                 <a:gridCol w="715061"/>
               </a:tblGrid>
-              <a:tr h="433070">
+              <a:tr h="450596">
                 <a:tc>
                   <a:txBody>
                     <a:bodyPr/>
@@ -13221,7 +13221,7 @@
                   </a:tcPr>
                 </a:tc>
               </a:tr>
-              <a:tr h="433070">
+              <a:tr h="450596">
                 <a:tc>
                   <a:txBody>
                     <a:bodyPr/>
@@ -13563,7 +13563,7 @@
                   </a:tcPr>
                 </a:tc>
               </a:tr>
-              <a:tr h="433070">
+              <a:tr h="450596">
                 <a:tc>
                   <a:txBody>
                     <a:bodyPr/>
@@ -13883,7 +13883,7 @@
                   </a:tcPr>
                 </a:tc>
               </a:tr>
-              <a:tr h="433070">
+              <a:tr h="450596">
                 <a:tc>
                   <a:txBody>
                     <a:bodyPr/>
@@ -14203,7 +14203,7 @@
                   </a:tcPr>
                 </a:tc>
               </a:tr>
-              <a:tr h="433070">
+              <a:tr h="450596">
                 <a:tc>
                   <a:txBody>
                     <a:bodyPr/>
@@ -14512,7 +14512,7 @@
                   </a:tcPr>
                 </a:tc>
               </a:tr>
-              <a:tr h="433070">
+              <a:tr h="450596">
                 <a:tc>
                   <a:txBody>
                     <a:bodyPr/>
@@ -14832,7 +14832,7 @@
                   </a:tcPr>
                 </a:tc>
               </a:tr>
-              <a:tr h="433070">
+              <a:tr h="450596">
                 <a:tc>
                   <a:txBody>
                     <a:bodyPr/>
@@ -15141,7 +15141,7 @@
                   </a:tcPr>
                 </a:tc>
               </a:tr>
-              <a:tr h="433070">
+              <a:tr h="450596">
                 <a:tc>
                   <a:txBody>
                     <a:bodyPr/>
@@ -15904,7 +15904,7 @@
                 <a:ea typeface="맑은 고딕" pitchFamily="34" charset="-122"/>
                 <a:cs typeface="맑은 고딕" pitchFamily="34" charset="-120"/>
               </a:rPr>
-              <a:t>주스 7.5 L를 한 사람에게 2 L씩 나누어 줘요.</a:t>
+              <a:t>주스 7.5 L를 한 사람에게 2 L씩 나누어 줘요.</a:t>
             </a:r>
             <a:endParaRPr lang="ko-KR" sz="2800" dirty="0"/>
           </a:p>
@@ -16191,7 +16191,7 @@
                 <a:ea typeface="맑은 고딕" pitchFamily="34" charset="-122"/>
                 <a:cs typeface="맑은 고딕" pitchFamily="34" charset="-120"/>
               </a:rPr>
-              <a:t>1.5 L가 남아요.</a:t>
+              <a:t>1.5 L가 남아요.</a:t>
             </a:r>
             <a:endParaRPr lang="ko-KR" sz="2800" dirty="0"/>
           </a:p>
@@ -16230,7 +16230,7 @@
                 <a:ea typeface="맑은 고딕" pitchFamily="34" charset="-122"/>
                 <a:cs typeface="맑은 고딕" pitchFamily="34" charset="-120"/>
               </a:rPr>
-              <a:t>7.5 L</a:t>
+              <a:t>7.5 L</a:t>
             </a:r>
             <a:endParaRPr lang="ko-KR" sz="2200" dirty="0"/>
           </a:p>
@@ -16832,7 +16832,7 @@
                 <a:ea typeface="맑은 고딕" pitchFamily="34" charset="-122"/>
                 <a:cs typeface="맑은 고딕" pitchFamily="34" charset="-120"/>
               </a:rPr>
-              <a:t>쌀 9.4 kg을 2 kg씩 담으면</a:t>
+              <a:t>쌀 9.4 kg을 2 kg씩 담으면</a:t>
             </a:r>
             <a:endParaRPr lang="ko-KR" sz="2800" dirty="0"/>
           </a:p>
